--- a/CV1711-WEEK10.pptx
+++ b/CV1711-WEEK10.pptx
@@ -144,18 +144,18 @@
   <pc:docChgLst>
     <pc:chgData name="#CUI SHUAIWEN#" userId="35a196ea-bcb8-475e-86cf-0b9eaca8a48f" providerId="ADAL" clId="{4D8D382B-DDFF-455F-B5ED-E854E938891F}"/>
     <pc:docChg chg="undo custSel addSld delSld modSld sldOrd">
-      <pc:chgData name="#CUI SHUAIWEN#" userId="35a196ea-bcb8-475e-86cf-0b9eaca8a48f" providerId="ADAL" clId="{4D8D382B-DDFF-455F-B5ED-E854E938891F}" dt="2026-03-24T13:39:52.441" v="1234" actId="1076"/>
+      <pc:chgData name="#CUI SHUAIWEN#" userId="35a196ea-bcb8-475e-86cf-0b9eaca8a48f" providerId="ADAL" clId="{4D8D382B-DDFF-455F-B5ED-E854E938891F}" dt="2026-03-24T13:48:26.976" v="1250" actId="14100"/>
       <pc:docMkLst>
         <pc:docMk/>
       </pc:docMkLst>
       <pc:sldChg chg="addSp delSp modSp add mod">
-        <pc:chgData name="#CUI SHUAIWEN#" userId="35a196ea-bcb8-475e-86cf-0b9eaca8a48f" providerId="ADAL" clId="{4D8D382B-DDFF-455F-B5ED-E854E938891F}" dt="2026-03-16T11:50:35.237" v="1086" actId="1076"/>
+        <pc:chgData name="#CUI SHUAIWEN#" userId="35a196ea-bcb8-475e-86cf-0b9eaca8a48f" providerId="ADAL" clId="{4D8D382B-DDFF-455F-B5ED-E854E938891F}" dt="2026-03-24T13:48:26.976" v="1250" actId="14100"/>
         <pc:sldMkLst>
           <pc:docMk/>
           <pc:sldMk cId="2224933946" sldId="304"/>
         </pc:sldMkLst>
         <pc:spChg chg="mod">
-          <ac:chgData name="#CUI SHUAIWEN#" userId="35a196ea-bcb8-475e-86cf-0b9eaca8a48f" providerId="ADAL" clId="{4D8D382B-DDFF-455F-B5ED-E854E938891F}" dt="2026-03-16T11:50:06.422" v="1075" actId="1076"/>
+          <ac:chgData name="#CUI SHUAIWEN#" userId="35a196ea-bcb8-475e-86cf-0b9eaca8a48f" providerId="ADAL" clId="{4D8D382B-DDFF-455F-B5ED-E854E938891F}" dt="2026-03-24T13:48:10.316" v="1245" actId="1076"/>
           <ac:spMkLst>
             <pc:docMk/>
             <pc:sldMk cId="2224933946" sldId="304"/>
@@ -163,15 +163,15 @@
           </ac:spMkLst>
         </pc:spChg>
         <pc:spChg chg="mod">
-          <ac:chgData name="#CUI SHUAIWEN#" userId="35a196ea-bcb8-475e-86cf-0b9eaca8a48f" providerId="ADAL" clId="{4D8D382B-DDFF-455F-B5ED-E854E938891F}" dt="2026-03-16T11:50:32.044" v="1085" actId="1076"/>
+          <ac:chgData name="#CUI SHUAIWEN#" userId="35a196ea-bcb8-475e-86cf-0b9eaca8a48f" providerId="ADAL" clId="{4D8D382B-DDFF-455F-B5ED-E854E938891F}" dt="2026-03-24T13:48:14.863" v="1246" actId="1076"/>
           <ac:spMkLst>
             <pc:docMk/>
             <pc:sldMk cId="2224933946" sldId="304"/>
             <ac:spMk id="11" creationId="{1F4BC619-0BB6-4377-DAFE-60564F8DE541}"/>
           </ac:spMkLst>
         </pc:spChg>
-        <pc:picChg chg="add mod ord">
-          <ac:chgData name="#CUI SHUAIWEN#" userId="35a196ea-bcb8-475e-86cf-0b9eaca8a48f" providerId="ADAL" clId="{4D8D382B-DDFF-455F-B5ED-E854E938891F}" dt="2026-03-16T11:50:03.789" v="1074" actId="1076"/>
+        <pc:picChg chg="add del mod ord">
+          <ac:chgData name="#CUI SHUAIWEN#" userId="35a196ea-bcb8-475e-86cf-0b9eaca8a48f" providerId="ADAL" clId="{4D8D382B-DDFF-455F-B5ED-E854E938891F}" dt="2026-03-24T13:47:47.241" v="1235" actId="478"/>
           <ac:picMkLst>
             <pc:docMk/>
             <pc:sldMk cId="2224933946" sldId="304"/>
@@ -179,15 +179,31 @@
           </ac:picMkLst>
         </pc:picChg>
         <pc:picChg chg="add mod ord">
-          <ac:chgData name="#CUI SHUAIWEN#" userId="35a196ea-bcb8-475e-86cf-0b9eaca8a48f" providerId="ADAL" clId="{4D8D382B-DDFF-455F-B5ED-E854E938891F}" dt="2026-03-16T11:50:21.322" v="1081" actId="167"/>
+          <ac:chgData name="#CUI SHUAIWEN#" userId="35a196ea-bcb8-475e-86cf-0b9eaca8a48f" providerId="ADAL" clId="{4D8D382B-DDFF-455F-B5ED-E854E938891F}" dt="2026-03-24T13:48:05.709" v="1244" actId="167"/>
+          <ac:picMkLst>
+            <pc:docMk/>
+            <pc:sldMk cId="2224933946" sldId="304"/>
+            <ac:picMk id="5" creationId="{4E46DCE2-CB5F-8D91-877D-807D93204613}"/>
+          </ac:picMkLst>
+        </pc:picChg>
+        <pc:picChg chg="add del mod ord">
+          <ac:chgData name="#CUI SHUAIWEN#" userId="35a196ea-bcb8-475e-86cf-0b9eaca8a48f" providerId="ADAL" clId="{4D8D382B-DDFF-455F-B5ED-E854E938891F}" dt="2026-03-24T13:47:47.780" v="1236" actId="478"/>
           <ac:picMkLst>
             <pc:docMk/>
             <pc:sldMk cId="2224933946" sldId="304"/>
             <ac:picMk id="8" creationId="{B8A90FD0-4827-2E98-7D6B-6D2F7B37892A}"/>
           </ac:picMkLst>
         </pc:picChg>
+        <pc:picChg chg="add mod ord">
+          <ac:chgData name="#CUI SHUAIWEN#" userId="35a196ea-bcb8-475e-86cf-0b9eaca8a48f" providerId="ADAL" clId="{4D8D382B-DDFF-455F-B5ED-E854E938891F}" dt="2026-03-24T13:48:05.709" v="1244" actId="167"/>
+          <ac:picMkLst>
+            <pc:docMk/>
+            <pc:sldMk cId="2224933946" sldId="304"/>
+            <ac:picMk id="9" creationId="{E00F29C7-0BC7-65E3-0FD1-DE6EE087AF04}"/>
+          </ac:picMkLst>
+        </pc:picChg>
         <pc:cxnChg chg="mod">
-          <ac:chgData name="#CUI SHUAIWEN#" userId="35a196ea-bcb8-475e-86cf-0b9eaca8a48f" providerId="ADAL" clId="{4D8D382B-DDFF-455F-B5ED-E854E938891F}" dt="2026-03-16T11:50:35.237" v="1086" actId="1076"/>
+          <ac:chgData name="#CUI SHUAIWEN#" userId="35a196ea-bcb8-475e-86cf-0b9eaca8a48f" providerId="ADAL" clId="{4D8D382B-DDFF-455F-B5ED-E854E938891F}" dt="2026-03-24T13:48:22.943" v="1249" actId="14100"/>
           <ac:cxnSpMkLst>
             <pc:docMk/>
             <pc:sldMk cId="2224933946" sldId="304"/>
@@ -195,7 +211,7 @@
           </ac:cxnSpMkLst>
         </pc:cxnChg>
         <pc:cxnChg chg="mod">
-          <ac:chgData name="#CUI SHUAIWEN#" userId="35a196ea-bcb8-475e-86cf-0b9eaca8a48f" providerId="ADAL" clId="{4D8D382B-DDFF-455F-B5ED-E854E938891F}" dt="2026-03-16T11:50:29.611" v="1084" actId="1076"/>
+          <ac:chgData name="#CUI SHUAIWEN#" userId="35a196ea-bcb8-475e-86cf-0b9eaca8a48f" providerId="ADAL" clId="{4D8D382B-DDFF-455F-B5ED-E854E938891F}" dt="2026-03-24T13:48:26.976" v="1250" actId="14100"/>
           <ac:cxnSpMkLst>
             <pc:docMk/>
             <pc:sldMk cId="2224933946" sldId="304"/>
@@ -4684,10 +4700,10 @@
       </p:grpSpPr>
       <p:pic>
         <p:nvPicPr>
-          <p:cNvPr id="8" name="Picture 7">
+          <p:cNvPr id="5" name="Picture 4">
             <a:extLst>
               <a:ext uri="{FF2B5EF4-FFF2-40B4-BE49-F238E27FC236}">
-                <a16:creationId xmlns:a16="http://schemas.microsoft.com/office/drawing/2014/main" id="{B8A90FD0-4827-2E98-7D6B-6D2F7B37892A}"/>
+                <a16:creationId xmlns:a16="http://schemas.microsoft.com/office/drawing/2014/main" id="{4E46DCE2-CB5F-8D91-877D-807D93204613}"/>
               </a:ext>
             </a:extLst>
           </p:cNvPr>
@@ -4704,8 +4720,8 @@
         </p:blipFill>
         <p:spPr>
           <a:xfrm>
-            <a:off x="6058853" y="644013"/>
-            <a:ext cx="1773342" cy="3855474"/>
+            <a:off x="3863860" y="381000"/>
+            <a:ext cx="1891027" cy="4111336"/>
           </a:xfrm>
           <a:prstGeom prst="rect">
             <a:avLst/>
@@ -4714,10 +4730,10 @@
       </p:pic>
       <p:pic>
         <p:nvPicPr>
-          <p:cNvPr id="3" name="Picture 2">
+          <p:cNvPr id="9" name="Picture 8">
             <a:extLst>
               <a:ext uri="{FF2B5EF4-FFF2-40B4-BE49-F238E27FC236}">
-                <a16:creationId xmlns:a16="http://schemas.microsoft.com/office/drawing/2014/main" id="{809C0B16-D457-608F-19EE-36DE146FA094}"/>
+                <a16:creationId xmlns:a16="http://schemas.microsoft.com/office/drawing/2014/main" id="{E00F29C7-0BC7-65E3-0FD1-DE6EE087AF04}"/>
               </a:ext>
             </a:extLst>
           </p:cNvPr>
@@ -4734,8 +4750,8 @@
         </p:blipFill>
         <p:spPr>
           <a:xfrm>
-            <a:off x="3535143" y="644013"/>
-            <a:ext cx="1773342" cy="3855474"/>
+            <a:off x="6558240" y="381000"/>
+            <a:ext cx="1891027" cy="4111336"/>
           </a:xfrm>
           <a:prstGeom prst="rect">
             <a:avLst/>
@@ -4822,7 +4838,7 @@
         </p:nvSpPr>
         <p:spPr>
           <a:xfrm>
-            <a:off x="3649133" y="3960130"/>
+            <a:off x="3947378" y="3242330"/>
             <a:ext cx="1032701" cy="211667"/>
           </a:xfrm>
           <a:prstGeom prst="roundRect">
@@ -4872,7 +4888,7 @@
         </p:nvSpPr>
         <p:spPr>
           <a:xfrm>
-            <a:off x="6648886" y="3242330"/>
+            <a:off x="7293122" y="1697548"/>
             <a:ext cx="1032701" cy="211667"/>
           </a:xfrm>
           <a:prstGeom prst="roundRect">
@@ -4917,13 +4933,15 @@
               </a:ext>
             </a:extLst>
           </p:cNvPr>
-          <p:cNvCxnSpPr/>
+          <p:cNvCxnSpPr>
+            <a:cxnSpLocks/>
+          </p:cNvCxnSpPr>
           <p:nvPr/>
         </p:nvCxnSpPr>
         <p:spPr>
           <a:xfrm flipH="1">
-            <a:off x="4701184" y="3717108"/>
-            <a:ext cx="355833" cy="338667"/>
+            <a:off x="4999429" y="2978727"/>
+            <a:ext cx="327644" cy="359248"/>
           </a:xfrm>
           <a:prstGeom prst="straightConnector1">
             <a:avLst/>
@@ -4959,13 +4977,15 @@
               </a:ext>
             </a:extLst>
           </p:cNvPr>
-          <p:cNvCxnSpPr/>
+          <p:cNvCxnSpPr>
+            <a:cxnSpLocks/>
+          </p:cNvCxnSpPr>
           <p:nvPr/>
         </p:nvCxnSpPr>
         <p:spPr>
           <a:xfrm flipH="1">
-            <a:off x="7737605" y="3009497"/>
-            <a:ext cx="355833" cy="338667"/>
+            <a:off x="8153400" y="1524000"/>
+            <a:ext cx="228441" cy="173548"/>
           </a:xfrm>
           <a:prstGeom prst="straightConnector1">
             <a:avLst/>
@@ -5646,12 +5666,12 @@
 </file>
 
 <file path=customXml/item1.xml><?xml version="1.0" encoding="utf-8"?>
-<?mso-contentType ?>
-<FormTemplates xmlns="http://schemas.microsoft.com/sharepoint/v3/contenttype/forms">
-  <Display>DocumentLibraryForm</Display>
-  <Edit>DocumentLibraryForm</Edit>
-  <New>DocumentLibraryForm</New>
-</FormTemplates>
+<p:properties xmlns:p="http://schemas.microsoft.com/office/2006/metadata/properties" xmlns:xsi="http://www.w3.org/2001/XMLSchema-instance" xmlns:pc="http://schemas.microsoft.com/office/infopath/2007/PartnerControls">
+  <documentManagement>
+    <PublishingExpirationDate xmlns="http://schemas.microsoft.com/sharepoint/v3" xsi:nil="true"/>
+    <PublishingStartDate xmlns="http://schemas.microsoft.com/sharepoint/v3" xsi:nil="true"/>
+  </documentManagement>
+</p:properties>
 </file>
 
 <file path=customXml/item2.xml><?xml version="1.0" encoding="utf-8"?>
@@ -5787,18 +5807,20 @@
 </file>
 
 <file path=customXml/item3.xml><?xml version="1.0" encoding="utf-8"?>
-<p:properties xmlns:p="http://schemas.microsoft.com/office/2006/metadata/properties" xmlns:xsi="http://www.w3.org/2001/XMLSchema-instance" xmlns:pc="http://schemas.microsoft.com/office/infopath/2007/PartnerControls">
-  <documentManagement>
-    <PublishingExpirationDate xmlns="http://schemas.microsoft.com/sharepoint/v3" xsi:nil="true"/>
-    <PublishingStartDate xmlns="http://schemas.microsoft.com/sharepoint/v3" xsi:nil="true"/>
-  </documentManagement>
-</p:properties>
+<?mso-contentType ?>
+<FormTemplates xmlns="http://schemas.microsoft.com/sharepoint/v3/contenttype/forms">
+  <Display>DocumentLibraryForm</Display>
+  <Edit>DocumentLibraryForm</Edit>
+  <New>DocumentLibraryForm</New>
+</FormTemplates>
 </file>
 
 <file path=customXml/itemProps1.xml><?xml version="1.0" encoding="utf-8"?>
-<ds:datastoreItem xmlns:ds="http://schemas.openxmlformats.org/officeDocument/2006/customXml" ds:itemID="{6CCB8030-6F99-446F-BD3B-E5E3F435F1FD}">
+<ds:datastoreItem xmlns:ds="http://schemas.openxmlformats.org/officeDocument/2006/customXml" ds:itemID="{264D3FE7-A0C8-4453-A806-BCAD6F53B901}">
   <ds:schemaRefs>
-    <ds:schemaRef ds:uri="http://schemas.microsoft.com/sharepoint/v3/contenttype/forms"/>
+    <ds:schemaRef ds:uri="http://schemas.microsoft.com/office/2006/metadata/properties"/>
+    <ds:schemaRef ds:uri="http://schemas.microsoft.com/office/infopath/2007/PartnerControls"/>
+    <ds:schemaRef ds:uri="http://schemas.microsoft.com/sharepoint/v3"/>
   </ds:schemaRefs>
 </ds:datastoreItem>
 </file>
@@ -5822,11 +5844,9 @@
 </file>
 
 <file path=customXml/itemProps3.xml><?xml version="1.0" encoding="utf-8"?>
-<ds:datastoreItem xmlns:ds="http://schemas.openxmlformats.org/officeDocument/2006/customXml" ds:itemID="{264D3FE7-A0C8-4453-A806-BCAD6F53B901}">
+<ds:datastoreItem xmlns:ds="http://schemas.openxmlformats.org/officeDocument/2006/customXml" ds:itemID="{6CCB8030-6F99-446F-BD3B-E5E3F435F1FD}">
   <ds:schemaRefs>
-    <ds:schemaRef ds:uri="http://schemas.microsoft.com/office/2006/metadata/properties"/>
-    <ds:schemaRef ds:uri="http://schemas.microsoft.com/office/infopath/2007/PartnerControls"/>
-    <ds:schemaRef ds:uri="http://schemas.microsoft.com/sharepoint/v3"/>
+    <ds:schemaRef ds:uri="http://schemas.microsoft.com/sharepoint/v3/contenttype/forms"/>
   </ds:schemaRefs>
 </ds:datastoreItem>
 </file>
